--- a/SIM-Tema-3/Actividad 3.2 Reporte de Practica_CynthiaMorales_SIM_7ISCM.pptx
+++ b/SIM-Tema-3/Actividad 3.2 Reporte de Practica_CynthiaMorales_SIM_7ISCM.pptx
@@ -5,7 +5,7 @@
     <p:sldMasterId id="2147483648" r:id="rId1"/>
   </p:sldMasterIdLst>
   <p:notesMasterIdLst>
-    <p:notesMasterId r:id="rId22"/>
+    <p:notesMasterId r:id="rId23"/>
   </p:notesMasterIdLst>
   <p:sldIdLst>
     <p:sldId id="256" r:id="rId2"/>
@@ -28,6 +28,7 @@
     <p:sldId id="273" r:id="rId19"/>
     <p:sldId id="274" r:id="rId20"/>
     <p:sldId id="275" r:id="rId21"/>
+    <p:sldId id="276" r:id="rId22"/>
   </p:sldIdLst>
   <p:sldSz cx="12192000" cy="6858000"/>
   <p:notesSz cx="6858000" cy="12192000"/>
@@ -5141,6 +5142,107 @@
         </p:txBody>
       </p:sp>
     </p:spTree>
+  </p:cSld>
+  <p:clrMapOvr>
+    <a:masterClrMapping/>
+  </p:clrMapOvr>
+</p:sld>
+</file>
+
+<file path=ppt/slides/slide21.xml><?xml version="1.0" encoding="utf-8"?>
+<p:sld xmlns:a="http://schemas.openxmlformats.org/drawingml/2006/main" xmlns:r="http://schemas.openxmlformats.org/officeDocument/2006/relationships" xmlns:p="http://schemas.openxmlformats.org/presentationml/2006/main">
+  <p:cSld>
+    <p:spTree>
+      <p:nvGrpSpPr>
+        <p:cNvPr id="1" name=""/>
+        <p:cNvGrpSpPr/>
+        <p:nvPr/>
+      </p:nvGrpSpPr>
+      <p:grpSpPr>
+        <a:xfrm>
+          <a:off x="0" y="0"/>
+          <a:ext cx="0" cy="0"/>
+          <a:chOff x="0" y="0"/>
+          <a:chExt cx="0" cy="0"/>
+        </a:xfrm>
+      </p:grpSpPr>
+      <p:sp>
+        <p:nvSpPr>
+          <p:cNvPr id="3" name="CuadroTexto 2">
+            <a:hlinkClick r:id="rId2"/>
+            <a:extLst>
+              <a:ext uri="{FF2B5EF4-FFF2-40B4-BE49-F238E27FC236}">
+                <a16:creationId xmlns:a16="http://schemas.microsoft.com/office/drawing/2014/main" id="{92B5B77F-6AAE-2712-305D-D94B7C23E01E}"/>
+              </a:ext>
+            </a:extLst>
+          </p:cNvPr>
+          <p:cNvSpPr txBox="1"/>
+          <p:nvPr/>
+        </p:nvSpPr>
+        <p:spPr>
+          <a:xfrm>
+            <a:off x="2087880" y="2717076"/>
+            <a:ext cx="8016240" cy="1200329"/>
+          </a:xfrm>
+          <a:prstGeom prst="rect">
+            <a:avLst/>
+          </a:prstGeom>
+          <a:noFill/>
+        </p:spPr>
+        <p:txBody>
+          <a:bodyPr wrap="square">
+            <a:spAutoFit/>
+          </a:bodyPr>
+          <a:lstStyle/>
+          <a:p>
+            <a:r>
+              <a:rPr lang="es-MX" dirty="0"/>
+              <a:t>https://github.com/Cynthia21Morales/SIMULACION_CynthiaJasmineMT/blob/main/SIM-Tema-3/Actividad%203.2%20Reporte%20de%20Practica_CynthiaMorales_SIM_7ISCM.pptx</a:t>
+            </a:r>
+          </a:p>
+        </p:txBody>
+      </p:sp>
+      <p:sp>
+        <p:nvSpPr>
+          <p:cNvPr id="4" name="CuadroTexto 3">
+            <a:extLst>
+              <a:ext uri="{FF2B5EF4-FFF2-40B4-BE49-F238E27FC236}">
+                <a16:creationId xmlns:a16="http://schemas.microsoft.com/office/drawing/2014/main" id="{B1673685-9ED2-0E1F-FA78-D84B18ACF4D2}"/>
+              </a:ext>
+            </a:extLst>
+          </p:cNvPr>
+          <p:cNvSpPr txBox="1"/>
+          <p:nvPr/>
+        </p:nvSpPr>
+        <p:spPr>
+          <a:xfrm>
+            <a:off x="1097280" y="995680"/>
+            <a:ext cx="10556240" cy="369332"/>
+          </a:xfrm>
+          <a:prstGeom prst="rect">
+            <a:avLst/>
+          </a:prstGeom>
+          <a:noFill/>
+        </p:spPr>
+        <p:txBody>
+          <a:bodyPr wrap="square" rtlCol="0">
+            <a:spAutoFit/>
+          </a:bodyPr>
+          <a:lstStyle/>
+          <a:p>
+            <a:r>
+              <a:rPr lang="es-MX" dirty="0"/>
+              <a:t>ANEXO LINK DE LA ACTIVIDAD SOLICITADA Y SUBIDA A GITHUB</a:t>
+            </a:r>
+          </a:p>
+        </p:txBody>
+      </p:sp>
+    </p:spTree>
+    <p:extLst>
+      <p:ext uri="{BB962C8B-B14F-4D97-AF65-F5344CB8AC3E}">
+        <p14:creationId xmlns:p14="http://schemas.microsoft.com/office/powerpoint/2010/main" val="1157817454"/>
+      </p:ext>
+    </p:extLst>
   </p:cSld>
   <p:clrMapOvr>
     <a:masterClrMapping/>
